--- a/backend/testdata/deck.pptx
+++ b/backend/testdata/deck.pptx
@@ -50,6 +50,14 @@
           <a:p>
             <a:r>
               <a:t>Quarterly Review</a:t>
+            </a:r>
+            <a:br/>
+            <a:r>
+              <a:t>Prepared by Marie Duval</a:t>
+            </a:r>
+            <a:br/>
+            <a:r>
+              <a:t>Internal draft, 12 February 2024</a:t>
             </a:r>
           </a:p>
         </p:txBody>
